--- a/public/fun/pack/pptx/reviewpro/보장점검양식프리미엄_32_부부점검_토프아이보리.pptx
+++ b/public/fun/pack/pptx/reviewpro/보장점검양식프리미엄_32_부부점검_토프아이보리.pptx
@@ -112,12 +112,12 @@
   <p:extLst>
     <p:ext uri="{521415D9-36F7-43E2-AB2F-B90AF26B5E84}">
       <p14:sectionLst xmlns:p14="http://schemas.microsoft.com/office/powerpoint/2010/main">
-        <p14:section name="시작" id="{EE5DBF3A-59E1-4D69-8C23-90C7A9C23BC6}">
+        <p14:section name="시작" id="{F0BC1360-0C9F-449E-8534-2DBB89CCE5E3}">
           <p14:sldIdLst>
             <p14:sldId id="256"/>
           </p14:sldIdLst>
         </p14:section>
-        <p14:section name="본문" id="{FA35B4FD-37B5-4F4B-84B3-6AFE1956E388}">
+        <p14:section name="본문" id="{1D41BA95-374E-4B91-8558-0815E724AF5F}">
           <p14:sldIdLst>
             <p14:sldId id="257"/>
             <p14:sldId id="258"/>
@@ -1500,7 +1500,7 @@
             </a:lvl1pPr>
           </a:lstStyle>
           <a:p>
-            <a:fld id="{521719E1-E1CD-43D4-A7CD-6C19FE2931C8}" type="slidenum">
+            <a:fld id="{507767CC-9DAE-4421-89B2-A6116E709B6E}" type="slidenum">
               <a:rPr lang="en-US"/>
               <a:t>‹#›</a:t>
             </a:fld>
@@ -2032,7 +2032,7 @@
             </a:lvl1pPr>
           </a:lstStyle>
           <a:p>
-            <a:fld id="{3CD0B4A6-8CDF-483A-A6CC-351E70C8D276}" type="slidenum">
+            <a:fld id="{7C61B893-068F-496D-B1C7-780DA48DD6A7}" type="slidenum">
               <a:rPr lang="en-US"/>
               <a:t>‹#›</a:t>
             </a:fld>
@@ -2621,7 +2621,7 @@
             </a:lvl1pPr>
           </a:lstStyle>
           <a:p>
-            <a:fld id="{F18A7DFD-2DDF-4BD6-89F8-B1425B0BBF64}" type="slidenum">
+            <a:fld id="{771C6262-3468-4555-84F3-8B777BC330AB}" type="slidenum">
               <a:rPr lang="en-US"/>
               <a:t>‹#›</a:t>
             </a:fld>
@@ -3424,7 +3424,7 @@
           <a:p>
             <a:r>
               <a:rPr lang="ko-KR"/>
-              <a:t>부부 점검 · 0000. 00. 00</a:t>
+              <a:t>부부 점검 · 날짜 입력</a:t>
             </a:r>
           </a:p>
           <a:p>
@@ -3515,7 +3515,7 @@
           <a:bodyPr/>
           <a:lstStyle/>
           <a:p>
-            <a:fld id="{29ECB421-26AA-4E02-82A1-5756C08B80DC}" type="slidenum">
+            <a:fld id="{EA33EF3F-70A2-46B3-9769-1447DBCF6EF5}" type="slidenum">
               <a:rPr lang="en-US"/>
               <a:t>‹#›</a:t>
             </a:fld>
@@ -4228,7 +4228,7 @@
           <a:bodyPr/>
           <a:lstStyle/>
           <a:p>
-            <a:fld id="{E2A7C9E7-D912-4537-BEEE-87016E958F19}" type="slidenum">
+            <a:fld id="{224FA7C4-75C9-4888-A2AA-BC178865C8B2}" type="slidenum">
               <a:rPr lang="en-US"/>
               <a:t>‹#›</a:t>
             </a:fld>
@@ -5734,7 +5734,7 @@
           <a:bodyPr/>
           <a:lstStyle/>
           <a:p>
-            <a:fld id="{340B3273-8244-4AA5-943B-184EF48064A1}" type="slidenum">
+            <a:fld id="{5315C66A-33B8-429A-BCBA-3841825E860C}" type="slidenum">
               <a:rPr lang="en-US"/>
               <a:t>‹#›</a:t>
             </a:fld>
@@ -7284,7 +7284,7 @@
           <a:bodyPr/>
           <a:lstStyle/>
           <a:p>
-            <a:fld id="{0CB9B73B-4235-4BB2-B178-1B28B44F0761}" type="slidenum">
+            <a:fld id="{286DDE7B-1430-4B23-A133-6865885C424E}" type="slidenum">
               <a:rPr lang="en-US"/>
               <a:t>‹#›</a:t>
             </a:fld>
@@ -8218,7 +8218,7 @@
           <a:bodyPr/>
           <a:lstStyle/>
           <a:p>
-            <a:fld id="{080EFFB4-76AA-4CEB-90BC-73A085E84FA6}" type="slidenum">
+            <a:fld id="{66CC4DF8-41E3-45CC-A124-7AEEB07E0C77}" type="slidenum">
               <a:rPr lang="en-US"/>
               <a:t>‹#›</a:t>
             </a:fld>
